--- a/MineShield - Smart Mine Safety.pptx
+++ b/MineShield - Smart Mine Safety.pptx
@@ -4,6 +4,9 @@
   <p:sldMasterIdLst>
     <p:sldMasterId id="2147483648" r:id="rId1"/>
   </p:sldMasterIdLst>
+  <p:notesMasterIdLst>
+    <p:notesMasterId r:id="rId15"/>
+  </p:notesMasterIdLst>
   <p:sldIdLst>
     <p:sldId id="256" r:id="rId2"/>
     <p:sldId id="257" r:id="rId3"/>
@@ -43,6 +46,440 @@
     </p:ext>
   </p:extLst>
 </p:presentation>
+</file>
+
+<file path=ppt/notesMasters/notesMaster1.xml><?xml version="1.0" encoding="utf-8"?>
+<p:notesMaster xmlns:a="http://schemas.openxmlformats.org/drawingml/2006/main" xmlns:r="http://schemas.openxmlformats.org/officeDocument/2006/relationships" xmlns:p="http://schemas.openxmlformats.org/presentationml/2006/main">
+  <p:cSld>
+    <p:bg>
+      <p:bgRef idx="1001">
+        <a:schemeClr val="bg1"/>
+      </p:bgRef>
+    </p:bg>
+    <p:spTree>
+      <p:nvGrpSpPr>
+        <p:cNvPr id="1" name=""/>
+        <p:cNvGrpSpPr/>
+        <p:nvPr/>
+      </p:nvGrpSpPr>
+      <p:grpSpPr>
+        <a:xfrm>
+          <a:off x="0" y="0"/>
+          <a:ext cx="0" cy="0"/>
+          <a:chOff x="0" y="0"/>
+          <a:chExt cx="0" cy="0"/>
+        </a:xfrm>
+      </p:grpSpPr>
+      <p:sp>
+        <p:nvSpPr>
+          <p:cNvPr id="2" name="Header Placeholder 1"/>
+          <p:cNvSpPr>
+            <a:spLocks noGrp="1"/>
+          </p:cNvSpPr>
+          <p:nvPr>
+            <p:ph type="hdr" sz="quarter"/>
+          </p:nvPr>
+        </p:nvSpPr>
+        <p:spPr>
+          <a:xfrm>
+            <a:off x="0" y="0"/>
+            <a:ext cx="8712200" cy="566738"/>
+          </a:xfrm>
+          <a:prstGeom prst="rect">
+            <a:avLst/>
+          </a:prstGeom>
+        </p:spPr>
+        <p:txBody>
+          <a:bodyPr vert="horz" lIns="91440" tIns="45720" rIns="91440" bIns="45720" rtlCol="0"/>
+          <a:lstStyle>
+            <a:lvl1pPr algn="l">
+              <a:defRPr sz="1200"/>
+            </a:lvl1pPr>
+          </a:lstStyle>
+          <a:p>
+            <a:endParaRPr lang="en-US"/>
+          </a:p>
+        </p:txBody>
+      </p:sp>
+      <p:sp>
+        <p:nvSpPr>
+          <p:cNvPr id="3" name="Date Placeholder 2"/>
+          <p:cNvSpPr>
+            <a:spLocks noGrp="1"/>
+          </p:cNvSpPr>
+          <p:nvPr>
+            <p:ph type="dt" idx="1"/>
+          </p:nvPr>
+        </p:nvSpPr>
+        <p:spPr>
+          <a:xfrm>
+            <a:off x="11387138" y="0"/>
+            <a:ext cx="8712200" cy="566738"/>
+          </a:xfrm>
+          <a:prstGeom prst="rect">
+            <a:avLst/>
+          </a:prstGeom>
+        </p:spPr>
+        <p:txBody>
+          <a:bodyPr vert="horz" lIns="91440" tIns="45720" rIns="91440" bIns="45720" rtlCol="0"/>
+          <a:lstStyle>
+            <a:lvl1pPr algn="r">
+              <a:defRPr sz="1200"/>
+            </a:lvl1pPr>
+          </a:lstStyle>
+          <a:p>
+            <a:fld id="{1F155AEB-60DA-461F-9124-5E397E484CF8}" type="datetimeFigureOut">
+              <a:rPr lang="en-US" smtClean="0"/>
+              <a:t>5/30/2026</a:t>
+            </a:fld>
+            <a:endParaRPr lang="en-US"/>
+          </a:p>
+        </p:txBody>
+      </p:sp>
+      <p:sp>
+        <p:nvSpPr>
+          <p:cNvPr id="4" name="Slide Image Placeholder 3"/>
+          <p:cNvSpPr>
+            <a:spLocks noGrp="1" noRot="1" noChangeAspect="1"/>
+          </p:cNvSpPr>
+          <p:nvPr>
+            <p:ph type="sldImg" idx="2"/>
+          </p:nvPr>
+        </p:nvSpPr>
+        <p:spPr>
+          <a:xfrm>
+            <a:off x="6659563" y="1414463"/>
+            <a:ext cx="6784975" cy="3816350"/>
+          </a:xfrm>
+          <a:prstGeom prst="rect">
+            <a:avLst/>
+          </a:prstGeom>
+          <a:noFill/>
+          <a:ln w="12700">
+            <a:solidFill>
+              <a:prstClr val="black"/>
+            </a:solidFill>
+          </a:ln>
+        </p:spPr>
+        <p:txBody>
+          <a:bodyPr vert="horz" lIns="91440" tIns="45720" rIns="91440" bIns="45720" rtlCol="0" anchor="ctr"/>
+          <a:lstStyle/>
+          <a:p>
+            <a:endParaRPr lang="en-US"/>
+          </a:p>
+        </p:txBody>
+      </p:sp>
+      <p:sp>
+        <p:nvSpPr>
+          <p:cNvPr id="5" name="Notes Placeholder 4"/>
+          <p:cNvSpPr>
+            <a:spLocks noGrp="1"/>
+          </p:cNvSpPr>
+          <p:nvPr>
+            <p:ph type="body" sz="quarter" idx="3"/>
+          </p:nvPr>
+        </p:nvSpPr>
+        <p:spPr>
+          <a:xfrm>
+            <a:off x="2009775" y="5441950"/>
+            <a:ext cx="16084550" cy="4454525"/>
+          </a:xfrm>
+          <a:prstGeom prst="rect">
+            <a:avLst/>
+          </a:prstGeom>
+        </p:spPr>
+        <p:txBody>
+          <a:bodyPr vert="horz" lIns="91440" tIns="45720" rIns="91440" bIns="45720" rtlCol="0"/>
+          <a:lstStyle/>
+          <a:p>
+            <a:pPr lvl="0"/>
+            <a:r>
+              <a:rPr lang="en-US" smtClean="0"/>
+              <a:t>Edit Master text styles</a:t>
+            </a:r>
+          </a:p>
+          <a:p>
+            <a:pPr lvl="1"/>
+            <a:r>
+              <a:rPr lang="en-US" smtClean="0"/>
+              <a:t>Second level</a:t>
+            </a:r>
+          </a:p>
+          <a:p>
+            <a:pPr lvl="2"/>
+            <a:r>
+              <a:rPr lang="en-US" smtClean="0"/>
+              <a:t>Third level</a:t>
+            </a:r>
+          </a:p>
+          <a:p>
+            <a:pPr lvl="3"/>
+            <a:r>
+              <a:rPr lang="en-US" smtClean="0"/>
+              <a:t>Fourth level</a:t>
+            </a:r>
+          </a:p>
+          <a:p>
+            <a:pPr lvl="4"/>
+            <a:r>
+              <a:rPr lang="en-US" smtClean="0"/>
+              <a:t>Fifth level</a:t>
+            </a:r>
+            <a:endParaRPr lang="en-US"/>
+          </a:p>
+        </p:txBody>
+      </p:sp>
+      <p:sp>
+        <p:nvSpPr>
+          <p:cNvPr id="6" name="Footer Placeholder 5"/>
+          <p:cNvSpPr>
+            <a:spLocks noGrp="1"/>
+          </p:cNvSpPr>
+          <p:nvPr>
+            <p:ph type="ftr" sz="quarter" idx="4"/>
+          </p:nvPr>
+        </p:nvSpPr>
+        <p:spPr>
+          <a:xfrm>
+            <a:off x="0" y="10742613"/>
+            <a:ext cx="8712200" cy="566737"/>
+          </a:xfrm>
+          <a:prstGeom prst="rect">
+            <a:avLst/>
+          </a:prstGeom>
+        </p:spPr>
+        <p:txBody>
+          <a:bodyPr vert="horz" lIns="91440" tIns="45720" rIns="91440" bIns="45720" rtlCol="0" anchor="b"/>
+          <a:lstStyle>
+            <a:lvl1pPr algn="l">
+              <a:defRPr sz="1200"/>
+            </a:lvl1pPr>
+          </a:lstStyle>
+          <a:p>
+            <a:endParaRPr lang="en-US"/>
+          </a:p>
+        </p:txBody>
+      </p:sp>
+      <p:sp>
+        <p:nvSpPr>
+          <p:cNvPr id="7" name="Slide Number Placeholder 6"/>
+          <p:cNvSpPr>
+            <a:spLocks noGrp="1"/>
+          </p:cNvSpPr>
+          <p:nvPr>
+            <p:ph type="sldNum" sz="quarter" idx="5"/>
+          </p:nvPr>
+        </p:nvSpPr>
+        <p:spPr>
+          <a:xfrm>
+            <a:off x="11387138" y="10742613"/>
+            <a:ext cx="8712200" cy="566737"/>
+          </a:xfrm>
+          <a:prstGeom prst="rect">
+            <a:avLst/>
+          </a:prstGeom>
+        </p:spPr>
+        <p:txBody>
+          <a:bodyPr vert="horz" lIns="91440" tIns="45720" rIns="91440" bIns="45720" rtlCol="0" anchor="b"/>
+          <a:lstStyle>
+            <a:lvl1pPr algn="r">
+              <a:defRPr sz="1200"/>
+            </a:lvl1pPr>
+          </a:lstStyle>
+          <a:p>
+            <a:fld id="{62CF4734-4DE8-4C14-A20E-1FDB52AE9EF5}" type="slidenum">
+              <a:rPr lang="en-US" smtClean="0"/>
+              <a:t>‹#›</a:t>
+            </a:fld>
+            <a:endParaRPr lang="en-US"/>
+          </a:p>
+        </p:txBody>
+      </p:sp>
+    </p:spTree>
+    <p:extLst>
+      <p:ext uri="{BB962C8B-B14F-4D97-AF65-F5344CB8AC3E}">
+        <p14:creationId xmlns:p14="http://schemas.microsoft.com/office/powerpoint/2010/main" val="1662298600"/>
+      </p:ext>
+    </p:extLst>
+  </p:cSld>
+  <p:clrMap bg1="lt1" tx1="dk1" bg2="lt2" tx2="dk2" accent1="accent1" accent2="accent2" accent3="accent3" accent4="accent4" accent5="accent5" accent6="accent6" hlink="hlink" folHlink="folHlink"/>
+  <p:notesStyle>
+    <a:lvl1pPr marL="0" algn="l" defTabSz="914400" rtl="0" eaLnBrk="1" latinLnBrk="0" hangingPunct="1">
+      <a:defRPr sz="1200" kern="1200">
+        <a:solidFill>
+          <a:schemeClr val="tx1"/>
+        </a:solidFill>
+        <a:latin typeface="+mn-lt"/>
+        <a:ea typeface="+mn-ea"/>
+        <a:cs typeface="+mn-cs"/>
+      </a:defRPr>
+    </a:lvl1pPr>
+    <a:lvl2pPr marL="457200" algn="l" defTabSz="914400" rtl="0" eaLnBrk="1" latinLnBrk="0" hangingPunct="1">
+      <a:defRPr sz="1200" kern="1200">
+        <a:solidFill>
+          <a:schemeClr val="tx1"/>
+        </a:solidFill>
+        <a:latin typeface="+mn-lt"/>
+        <a:ea typeface="+mn-ea"/>
+        <a:cs typeface="+mn-cs"/>
+      </a:defRPr>
+    </a:lvl2pPr>
+    <a:lvl3pPr marL="914400" algn="l" defTabSz="914400" rtl="0" eaLnBrk="1" latinLnBrk="0" hangingPunct="1">
+      <a:defRPr sz="1200" kern="1200">
+        <a:solidFill>
+          <a:schemeClr val="tx1"/>
+        </a:solidFill>
+        <a:latin typeface="+mn-lt"/>
+        <a:ea typeface="+mn-ea"/>
+        <a:cs typeface="+mn-cs"/>
+      </a:defRPr>
+    </a:lvl3pPr>
+    <a:lvl4pPr marL="1371600" algn="l" defTabSz="914400" rtl="0" eaLnBrk="1" latinLnBrk="0" hangingPunct="1">
+      <a:defRPr sz="1200" kern="1200">
+        <a:solidFill>
+          <a:schemeClr val="tx1"/>
+        </a:solidFill>
+        <a:latin typeface="+mn-lt"/>
+        <a:ea typeface="+mn-ea"/>
+        <a:cs typeface="+mn-cs"/>
+      </a:defRPr>
+    </a:lvl4pPr>
+    <a:lvl5pPr marL="1828800" algn="l" defTabSz="914400" rtl="0" eaLnBrk="1" latinLnBrk="0" hangingPunct="1">
+      <a:defRPr sz="1200" kern="1200">
+        <a:solidFill>
+          <a:schemeClr val="tx1"/>
+        </a:solidFill>
+        <a:latin typeface="+mn-lt"/>
+        <a:ea typeface="+mn-ea"/>
+        <a:cs typeface="+mn-cs"/>
+      </a:defRPr>
+    </a:lvl5pPr>
+    <a:lvl6pPr marL="2286000" algn="l" defTabSz="914400" rtl="0" eaLnBrk="1" latinLnBrk="0" hangingPunct="1">
+      <a:defRPr sz="1200" kern="1200">
+        <a:solidFill>
+          <a:schemeClr val="tx1"/>
+        </a:solidFill>
+        <a:latin typeface="+mn-lt"/>
+        <a:ea typeface="+mn-ea"/>
+        <a:cs typeface="+mn-cs"/>
+      </a:defRPr>
+    </a:lvl6pPr>
+    <a:lvl7pPr marL="2743200" algn="l" defTabSz="914400" rtl="0" eaLnBrk="1" latinLnBrk="0" hangingPunct="1">
+      <a:defRPr sz="1200" kern="1200">
+        <a:solidFill>
+          <a:schemeClr val="tx1"/>
+        </a:solidFill>
+        <a:latin typeface="+mn-lt"/>
+        <a:ea typeface="+mn-ea"/>
+        <a:cs typeface="+mn-cs"/>
+      </a:defRPr>
+    </a:lvl7pPr>
+    <a:lvl8pPr marL="3200400" algn="l" defTabSz="914400" rtl="0" eaLnBrk="1" latinLnBrk="0" hangingPunct="1">
+      <a:defRPr sz="1200" kern="1200">
+        <a:solidFill>
+          <a:schemeClr val="tx1"/>
+        </a:solidFill>
+        <a:latin typeface="+mn-lt"/>
+        <a:ea typeface="+mn-ea"/>
+        <a:cs typeface="+mn-cs"/>
+      </a:defRPr>
+    </a:lvl8pPr>
+    <a:lvl9pPr marL="3657600" algn="l" defTabSz="914400" rtl="0" eaLnBrk="1" latinLnBrk="0" hangingPunct="1">
+      <a:defRPr sz="1200" kern="1200">
+        <a:solidFill>
+          <a:schemeClr val="tx1"/>
+        </a:solidFill>
+        <a:latin typeface="+mn-lt"/>
+        <a:ea typeface="+mn-ea"/>
+        <a:cs typeface="+mn-cs"/>
+      </a:defRPr>
+    </a:lvl9pPr>
+  </p:notesStyle>
+</p:notesMaster>
+</file>
+
+<file path=ppt/notesSlides/notesSlide1.xml><?xml version="1.0" encoding="utf-8"?>
+<p:notes xmlns:a="http://schemas.openxmlformats.org/drawingml/2006/main" xmlns:r="http://schemas.openxmlformats.org/officeDocument/2006/relationships" xmlns:p="http://schemas.openxmlformats.org/presentationml/2006/main">
+  <p:cSld>
+    <p:spTree>
+      <p:nvGrpSpPr>
+        <p:cNvPr id="1" name=""/>
+        <p:cNvGrpSpPr/>
+        <p:nvPr/>
+      </p:nvGrpSpPr>
+      <p:grpSpPr>
+        <a:xfrm>
+          <a:off x="0" y="0"/>
+          <a:ext cx="0" cy="0"/>
+          <a:chOff x="0" y="0"/>
+          <a:chExt cx="0" cy="0"/>
+        </a:xfrm>
+      </p:grpSpPr>
+      <p:sp>
+        <p:nvSpPr>
+          <p:cNvPr id="2" name="Slide Image Placeholder 1"/>
+          <p:cNvSpPr>
+            <a:spLocks noGrp="1" noRot="1" noChangeAspect="1"/>
+          </p:cNvSpPr>
+          <p:nvPr>
+            <p:ph type="sldImg"/>
+          </p:nvPr>
+        </p:nvSpPr>
+        <p:spPr/>
+      </p:sp>
+      <p:sp>
+        <p:nvSpPr>
+          <p:cNvPr id="3" name="Notes Placeholder 2"/>
+          <p:cNvSpPr>
+            <a:spLocks noGrp="1"/>
+          </p:cNvSpPr>
+          <p:nvPr>
+            <p:ph type="body" idx="1"/>
+          </p:nvPr>
+        </p:nvSpPr>
+        <p:spPr/>
+        <p:txBody>
+          <a:bodyPr/>
+          <a:lstStyle/>
+          <a:p>
+            <a:endParaRPr lang="en-US" dirty="0"/>
+          </a:p>
+        </p:txBody>
+      </p:sp>
+      <p:sp>
+        <p:nvSpPr>
+          <p:cNvPr id="4" name="Slide Number Placeholder 3"/>
+          <p:cNvSpPr>
+            <a:spLocks noGrp="1"/>
+          </p:cNvSpPr>
+          <p:nvPr>
+            <p:ph type="sldNum" sz="quarter" idx="10"/>
+          </p:nvPr>
+        </p:nvSpPr>
+        <p:spPr/>
+        <p:txBody>
+          <a:bodyPr/>
+          <a:lstStyle/>
+          <a:p>
+            <a:fld id="{62CF4734-4DE8-4C14-A20E-1FDB52AE9EF5}" type="slidenum">
+              <a:rPr lang="en-US" smtClean="0"/>
+              <a:t>4</a:t>
+            </a:fld>
+            <a:endParaRPr lang="en-US"/>
+          </a:p>
+        </p:txBody>
+      </p:sp>
+    </p:spTree>
+    <p:extLst>
+      <p:ext uri="{BB962C8B-B14F-4D97-AF65-F5344CB8AC3E}">
+        <p14:creationId xmlns:p14="http://schemas.microsoft.com/office/powerpoint/2010/main" val="536873139"/>
+      </p:ext>
+    </p:extLst>
+  </p:cSld>
+  <p:clrMapOvr>
+    <a:masterClrMapping/>
+  </p:clrMapOvr>
+</p:notes>
 </file>
 
 <file path=ppt/slideLayouts/slideLayout1.xml><?xml version="1.0" encoding="utf-8"?>
@@ -196,7 +633,7 @@
           <a:p>
             <a:fld id="{1D8BD707-D9CF-40AE-B4C6-C98DA3205C09}" type="datetimeFigureOut">
               <a:rPr lang="en-US"/>
-              <a:t>5/29/2026</a:t>
+              <a:t>5/30/2026</a:t>
             </a:fld>
             <a:endParaRPr lang="en-US"/>
           </a:p>
@@ -373,7 +810,7 @@
           <a:p>
             <a:fld id="{1D8BD707-D9CF-40AE-B4C6-C98DA3205C09}" type="datetimeFigureOut">
               <a:rPr lang="en-US"/>
-              <a:t>5/29/2026</a:t>
+              <a:t>5/30/2026</a:t>
             </a:fld>
             <a:endParaRPr lang="en-US"/>
           </a:p>
@@ -587,7 +1024,7 @@
           <a:p>
             <a:fld id="{1D8BD707-D9CF-40AE-B4C6-C98DA3205C09}" type="datetimeFigureOut">
               <a:rPr lang="en-US"/>
-              <a:t>5/29/2026</a:t>
+              <a:t>5/30/2026</a:t>
             </a:fld>
             <a:endParaRPr lang="en-US"/>
           </a:p>
@@ -735,7 +1172,7 @@
           <a:p>
             <a:fld id="{1D8BD707-D9CF-40AE-B4C6-C98DA3205C09}" type="datetimeFigureOut">
               <a:rPr lang="en-US"/>
-              <a:t>5/29/2026</a:t>
+              <a:t>5/30/2026</a:t>
             </a:fld>
             <a:endParaRPr lang="en-US"/>
           </a:p>
@@ -928,7 +1365,7 @@
           <a:p>
             <a:fld id="{1D8BD707-D9CF-40AE-B4C6-C98DA3205C09}" type="datetimeFigureOut">
               <a:rPr lang="en-US"/>
-              <a:t>5/29/2026</a:t>
+              <a:t>5/30/2026</a:t>
             </a:fld>
             <a:endParaRPr lang="en-US"/>
           </a:p>
@@ -1153,7 +1590,7 @@
           <a:p>
             <a:fld id="{1D8BD707-D9CF-40AE-B4C6-C98DA3205C09}" type="datetimeFigureOut">
               <a:rPr lang="en-US"/>
-              <a:t>5/29/2026</a:t>
+              <a:t>5/30/2026</a:t>
             </a:fld>
             <a:endParaRPr lang="en-US"/>
           </a:p>
@@ -6676,20 +7113,22 @@
       </p:grpSpPr>
       <p:pic>
         <p:nvPicPr>
-          <p:cNvPr id="2" name="object 2"/>
-          <p:cNvPicPr/>
+          <p:cNvPr id="11" name="Picture 10"/>
+          <p:cNvPicPr>
+            <a:picLocks noChangeAspect="1"/>
+          </p:cNvPicPr>
           <p:nvPr/>
         </p:nvPicPr>
         <p:blipFill>
-          <a:blip r:embed="rId2" cstate="print"/>
+          <a:blip r:embed="rId2"/>
           <a:stretch>
             <a:fillRect/>
           </a:stretch>
         </p:blipFill>
         <p:spPr>
           <a:xfrm>
-            <a:off x="1060450" y="4112174"/>
-            <a:ext cx="7038524" cy="4933229"/>
+            <a:off x="0" y="3444662"/>
+            <a:ext cx="20104100" cy="5719935"/>
           </a:xfrm>
           <a:prstGeom prst="rect">
             <a:avLst/>
@@ -6708,8 +7147,8 @@
         </p:nvSpPr>
         <p:spPr>
           <a:xfrm>
-            <a:off x="1060450" y="2073275"/>
-            <a:ext cx="11953127" cy="1011525"/>
+            <a:off x="527050" y="930275"/>
+            <a:ext cx="11953127" cy="1049997"/>
           </a:xfrm>
           <a:prstGeom prst="rect">
             <a:avLst/>
@@ -6730,7 +7169,7 @@
               </a:spcBef>
             </a:pPr>
             <a:r>
-              <a:rPr sz="5150" spc="160" dirty="0" smtClean="0">
+              <a:rPr sz="5400" spc="160" dirty="0" smtClean="0">
                 <a:solidFill>
                   <a:schemeClr val="tx1"/>
                 </a:solidFill>
@@ -6740,7 +7179,7 @@
               <a:t>S</a:t>
             </a:r>
             <a:r>
-              <a:rPr lang="en-US" sz="5150" spc="160" dirty="0" smtClean="0">
+              <a:rPr lang="en-US" sz="5400" spc="160" dirty="0" smtClean="0">
                 <a:solidFill>
                   <a:schemeClr val="tx1"/>
                 </a:solidFill>
@@ -6750,7 +7189,7 @@
               <a:t>olution </a:t>
             </a:r>
             <a:r>
-              <a:rPr lang="en-US" sz="5150" spc="160" dirty="0" smtClean="0">
+              <a:rPr lang="en-US" sz="5400" spc="160" dirty="0" smtClean="0">
                 <a:solidFill>
                   <a:srgbClr val="FFC000"/>
                 </a:solidFill>
@@ -6759,7 +7198,7 @@
               </a:rPr>
               <a:t>MineShield</a:t>
             </a:r>
-            <a:endParaRPr sz="5150" dirty="0">
+            <a:endParaRPr sz="5400" dirty="0">
               <a:solidFill>
                 <a:srgbClr val="FFC000"/>
               </a:solidFill>
@@ -6780,6 +7219,10 @@
           </p:nvPr>
         </p:nvSpPr>
         <p:spPr>
+          <a:xfrm>
+            <a:off x="8909050" y="4174862"/>
+            <a:ext cx="8328025" cy="4342130"/>
+          </a:xfrm>
           <a:prstGeom prst="rect">
             <a:avLst/>
           </a:prstGeom>
@@ -6801,7 +7244,10 @@
             <a:r>
               <a:rPr spc="80" dirty="0">
                 <a:solidFill>
-                  <a:schemeClr val="tx1"/>
+                  <a:schemeClr val="tx1">
+                    <a:lumMod val="95000"/>
+                    <a:lumOff val="5000"/>
+                  </a:schemeClr>
                 </a:solidFill>
               </a:rPr>
               <a:t>Modern</a:t>
@@ -6809,7 +7255,10 @@
             <a:r>
               <a:rPr spc="-160" dirty="0">
                 <a:solidFill>
-                  <a:schemeClr val="tx1"/>
+                  <a:schemeClr val="tx1">
+                    <a:lumMod val="95000"/>
+                    <a:lumOff val="5000"/>
+                  </a:schemeClr>
                 </a:solidFill>
               </a:rPr>
               <a:t> </a:t>
@@ -6817,7 +7266,10 @@
             <a:r>
               <a:rPr spc="185" dirty="0">
                 <a:solidFill>
-                  <a:schemeClr val="tx1"/>
+                  <a:schemeClr val="tx1">
+                    <a:lumMod val="95000"/>
+                    <a:lumOff val="5000"/>
+                  </a:schemeClr>
                 </a:solidFill>
               </a:rPr>
               <a:t>Safety</a:t>
@@ -6825,7 +7277,10 @@
             <a:r>
               <a:rPr spc="-85" dirty="0">
                 <a:solidFill>
-                  <a:schemeClr val="tx1"/>
+                  <a:schemeClr val="tx1">
+                    <a:lumMod val="95000"/>
+                    <a:lumOff val="5000"/>
+                  </a:schemeClr>
                 </a:solidFill>
               </a:rPr>
               <a:t> </a:t>
@@ -6833,7 +7288,10 @@
             <a:r>
               <a:rPr spc="180" dirty="0">
                 <a:solidFill>
-                  <a:schemeClr val="tx1"/>
+                  <a:schemeClr val="tx1">
+                    <a:lumMod val="95000"/>
+                    <a:lumOff val="5000"/>
+                  </a:schemeClr>
                 </a:solidFill>
               </a:rPr>
               <a:t>at</a:t>
@@ -6841,7 +7299,10 @@
             <a:r>
               <a:rPr spc="70" dirty="0">
                 <a:solidFill>
-                  <a:schemeClr val="tx1"/>
+                  <a:schemeClr val="tx1">
+                    <a:lumMod val="95000"/>
+                    <a:lumOff val="5000"/>
+                  </a:schemeClr>
                 </a:solidFill>
               </a:rPr>
               <a:t> </a:t>
@@ -6849,7 +7310,10 @@
             <a:r>
               <a:rPr spc="135" dirty="0">
                 <a:solidFill>
-                  <a:schemeClr val="tx1"/>
+                  <a:schemeClr val="tx1">
+                    <a:lumMod val="95000"/>
+                    <a:lumOff val="5000"/>
+                  </a:schemeClr>
                 </a:solidFill>
               </a:rPr>
               <a:t>Your</a:t>
@@ -6857,7 +7321,10 @@
             <a:r>
               <a:rPr spc="-150" dirty="0">
                 <a:solidFill>
-                  <a:schemeClr val="tx1"/>
+                  <a:schemeClr val="tx1">
+                    <a:lumMod val="95000"/>
+                    <a:lumOff val="5000"/>
+                  </a:schemeClr>
                 </a:solidFill>
               </a:rPr>
               <a:t> </a:t>
@@ -6865,7 +7332,10 @@
             <a:r>
               <a:rPr spc="100" dirty="0">
                 <a:solidFill>
-                  <a:schemeClr val="tx1"/>
+                  <a:schemeClr val="tx1">
+                    <a:lumMod val="95000"/>
+                    <a:lumOff val="5000"/>
+                  </a:schemeClr>
                 </a:solidFill>
               </a:rPr>
               <a:t>Fingertips</a:t>
@@ -7541,6 +8011,30 @@
           </a:p>
         </p:txBody>
       </p:sp>
+      <p:pic>
+        <p:nvPicPr>
+          <p:cNvPr id="12" name="Picture 11"/>
+          <p:cNvPicPr>
+            <a:picLocks noChangeAspect="1"/>
+          </p:cNvPicPr>
+          <p:nvPr/>
+        </p:nvPicPr>
+        <p:blipFill>
+          <a:blip r:embed="rId3"/>
+          <a:stretch>
+            <a:fillRect/>
+          </a:stretch>
+        </p:blipFill>
+        <p:spPr>
+          <a:xfrm>
+            <a:off x="2051050" y="4112174"/>
+            <a:ext cx="3352800" cy="4133301"/>
+          </a:xfrm>
+          <a:prstGeom prst="rect">
+            <a:avLst/>
+          </a:prstGeom>
+        </p:spPr>
+      </p:pic>
     </p:spTree>
   </p:cSld>
   <p:clrMapOvr>
@@ -7657,7 +8151,7 @@
         </p:nvSpPr>
         <p:spPr>
           <a:xfrm>
-            <a:off x="1543018" y="5442631"/>
+            <a:off x="1543018" y="7077934"/>
             <a:ext cx="4366895" cy="575310"/>
           </a:xfrm>
           <a:prstGeom prst="rect">
@@ -7743,7 +8237,7 @@
         </p:nvSpPr>
         <p:spPr>
           <a:xfrm>
-            <a:off x="1550417" y="6261324"/>
+            <a:off x="1480787" y="7873271"/>
             <a:ext cx="4491355" cy="1391920"/>
           </a:xfrm>
           <a:prstGeom prst="rect">
@@ -8029,7 +8523,7 @@
         </p:nvSpPr>
         <p:spPr>
           <a:xfrm>
-            <a:off x="7770577" y="5442631"/>
+            <a:off x="7770577" y="7077934"/>
             <a:ext cx="3474085" cy="575310"/>
           </a:xfrm>
           <a:prstGeom prst="rect">
@@ -8080,7 +8574,7 @@
               </a:rPr>
               <a:t>Backend</a:t>
             </a:r>
-            <a:endParaRPr sz="3600">
+            <a:endParaRPr sz="3600" dirty="0">
               <a:latin typeface="Calibri"/>
               <a:cs typeface="Calibri"/>
             </a:endParaRPr>
@@ -8095,7 +8589,7 @@
         </p:nvSpPr>
         <p:spPr>
           <a:xfrm>
-            <a:off x="7786476" y="6261324"/>
+            <a:off x="7800513" y="7873271"/>
             <a:ext cx="4149090" cy="1831975"/>
           </a:xfrm>
           <a:prstGeom prst="rect">
@@ -8404,7 +8898,7 @@
         </p:nvSpPr>
         <p:spPr>
           <a:xfrm>
-            <a:off x="14020724" y="5442631"/>
+            <a:off x="13862050" y="7077934"/>
             <a:ext cx="4079240" cy="575310"/>
           </a:xfrm>
           <a:prstGeom prst="rect">
@@ -8455,7 +8949,7 @@
               </a:rPr>
               <a:t>Sensors</a:t>
             </a:r>
-            <a:endParaRPr sz="3600">
+            <a:endParaRPr sz="3600" dirty="0">
               <a:latin typeface="Calibri"/>
               <a:cs typeface="Calibri"/>
             </a:endParaRPr>
@@ -8470,7 +8964,7 @@
         </p:nvSpPr>
         <p:spPr>
           <a:xfrm>
-            <a:off x="14013388" y="6261324"/>
+            <a:off x="13862050" y="7873271"/>
             <a:ext cx="4475480" cy="1391920"/>
           </a:xfrm>
           <a:prstGeom prst="rect">
@@ -8711,6 +9205,78 @@
           </a:p>
         </p:txBody>
       </p:sp>
+      <p:pic>
+        <p:nvPicPr>
+          <p:cNvPr id="10" name="Picture 9"/>
+          <p:cNvPicPr>
+            <a:picLocks noChangeAspect="1"/>
+          </p:cNvPicPr>
+          <p:nvPr/>
+        </p:nvPicPr>
+        <p:blipFill>
+          <a:blip r:embed="rId3"/>
+          <a:stretch>
+            <a:fillRect/>
+          </a:stretch>
+        </p:blipFill>
+        <p:spPr>
+          <a:xfrm>
+            <a:off x="2127250" y="4130675"/>
+            <a:ext cx="2743200" cy="2590800"/>
+          </a:xfrm>
+          <a:prstGeom prst="rect">
+            <a:avLst/>
+          </a:prstGeom>
+        </p:spPr>
+      </p:pic>
+      <p:pic>
+        <p:nvPicPr>
+          <p:cNvPr id="11" name="Picture 10"/>
+          <p:cNvPicPr>
+            <a:picLocks noChangeAspect="1"/>
+          </p:cNvPicPr>
+          <p:nvPr/>
+        </p:nvPicPr>
+        <p:blipFill>
+          <a:blip r:embed="rId4"/>
+          <a:stretch>
+            <a:fillRect/>
+          </a:stretch>
+        </p:blipFill>
+        <p:spPr>
+          <a:xfrm>
+            <a:off x="8136019" y="4130675"/>
+            <a:ext cx="2743200" cy="2590799"/>
+          </a:xfrm>
+          <a:prstGeom prst="rect">
+            <a:avLst/>
+          </a:prstGeom>
+        </p:spPr>
+      </p:pic>
+      <p:pic>
+        <p:nvPicPr>
+          <p:cNvPr id="12" name="Picture 11"/>
+          <p:cNvPicPr>
+            <a:picLocks noChangeAspect="1"/>
+          </p:cNvPicPr>
+          <p:nvPr/>
+        </p:nvPicPr>
+        <p:blipFill>
+          <a:blip r:embed="rId5"/>
+          <a:stretch>
+            <a:fillRect/>
+          </a:stretch>
+        </p:blipFill>
+        <p:spPr>
+          <a:xfrm>
+            <a:off x="14319250" y="4130675"/>
+            <a:ext cx="2743200" cy="2590799"/>
+          </a:xfrm>
+          <a:prstGeom prst="rect">
+            <a:avLst/>
+          </a:prstGeom>
+        </p:spPr>
+      </p:pic>
     </p:spTree>
   </p:cSld>
   <p:clrMapOvr>
@@ -11012,17 +11578,37 @@
               </a:spcBef>
             </a:pPr>
             <a:r>
-              <a:rPr sz="6550" spc="95" dirty="0">
+              <a:rPr sz="6550" spc="95" dirty="0" smtClean="0">
                 <a:solidFill>
                   <a:srgbClr val="0A243F"/>
                 </a:solidFill>
                 <a:latin typeface="Calibri"/>
                 <a:cs typeface="Calibri"/>
               </a:rPr>
-              <a:t>Mopping</a:t>
-            </a:r>
-            <a:r>
-              <a:rPr sz="6550" spc="225" dirty="0">
+              <a:t>M</a:t>
+            </a:r>
+            <a:r>
+              <a:rPr lang="en-US" sz="6550" spc="95" dirty="0" smtClean="0">
+                <a:solidFill>
+                  <a:srgbClr val="0A243F"/>
+                </a:solidFill>
+                <a:latin typeface="Calibri"/>
+                <a:cs typeface="Calibri"/>
+              </a:rPr>
+              <a:t>a</a:t>
+            </a:r>
+            <a:r>
+              <a:rPr sz="6550" spc="95" dirty="0" smtClean="0">
+                <a:solidFill>
+                  <a:srgbClr val="0A243F"/>
+                </a:solidFill>
+                <a:latin typeface="Calibri"/>
+                <a:cs typeface="Calibri"/>
+              </a:rPr>
+              <a:t>pping</a:t>
+            </a:r>
+            <a:r>
+              <a:rPr sz="6550" spc="225" dirty="0" smtClean="0">
                 <a:solidFill>
                   <a:srgbClr val="0A243F"/>
                 </a:solidFill>
@@ -12203,85 +12789,6 @@
           <a:chExt cx="0" cy="0"/>
         </a:xfrm>
       </p:grpSpPr>
-      <p:grpSp>
-        <p:nvGrpSpPr>
-          <p:cNvPr id="2" name="object 2"/>
-          <p:cNvGrpSpPr/>
-          <p:nvPr/>
-        </p:nvGrpSpPr>
-        <p:grpSpPr>
-          <a:xfrm>
-            <a:off x="679450" y="3872144"/>
-            <a:ext cx="18141315" cy="6165124"/>
-            <a:chOff x="1052323" y="5182230"/>
-            <a:chExt cx="18141315" cy="3310967"/>
-          </a:xfrm>
-        </p:grpSpPr>
-        <p:sp>
-          <p:nvSpPr>
-            <p:cNvPr id="3" name="object 3"/>
-            <p:cNvSpPr/>
-            <p:nvPr/>
-          </p:nvSpPr>
-          <p:spPr>
-            <a:xfrm>
-              <a:off x="1052323" y="8493197"/>
-              <a:ext cx="18141315" cy="0"/>
-            </a:xfrm>
-            <a:custGeom>
-              <a:avLst/>
-              <a:gdLst/>
-              <a:ahLst/>
-              <a:cxnLst/>
-              <a:rect l="l" t="t" r="r" b="b"/>
-              <a:pathLst>
-                <a:path w="18141315">
-                  <a:moveTo>
-                    <a:pt x="0" y="0"/>
-                  </a:moveTo>
-                  <a:lnTo>
-                    <a:pt x="18140810" y="0"/>
-                  </a:lnTo>
-                </a:path>
-              </a:pathLst>
-            </a:custGeom>
-            <a:ln w="23559">
-              <a:solidFill>
-                <a:srgbClr val="0C1F38"/>
-              </a:solidFill>
-            </a:ln>
-          </p:spPr>
-          <p:txBody>
-            <a:bodyPr wrap="square" lIns="0" tIns="0" rIns="0" bIns="0" rtlCol="0"/>
-            <a:lstStyle/>
-            <a:p>
-              <a:endParaRPr/>
-            </a:p>
-          </p:txBody>
-        </p:sp>
-        <p:pic>
-          <p:nvPicPr>
-            <p:cNvPr id="4" name="object 4"/>
-            <p:cNvPicPr/>
-            <p:nvPr/>
-          </p:nvPicPr>
-          <p:blipFill>
-            <a:blip r:embed="rId2" cstate="print"/>
-            <a:stretch>
-              <a:fillRect/>
-            </a:stretch>
-          </p:blipFill>
-          <p:spPr>
-            <a:xfrm>
-              <a:off x="1147067" y="5182230"/>
-              <a:ext cx="18046571" cy="3086293"/>
-            </a:xfrm>
-            <a:prstGeom prst="rect">
-              <a:avLst/>
-            </a:prstGeom>
-          </p:spPr>
-        </p:pic>
-      </p:grpSp>
       <p:sp>
         <p:nvSpPr>
           <p:cNvPr id="5" name="object 5"/>
@@ -12355,7 +12862,7 @@
         </p:nvSpPr>
         <p:spPr>
           <a:xfrm>
-            <a:off x="928506" y="2920456"/>
+            <a:off x="1822450" y="2920456"/>
             <a:ext cx="15006955" cy="379095"/>
           </a:xfrm>
           <a:prstGeom prst="rect">
@@ -12664,7 +13171,7 @@
         </p:nvSpPr>
         <p:spPr>
           <a:xfrm>
-            <a:off x="5671664" y="9627058"/>
+            <a:off x="4862971" y="9627058"/>
             <a:ext cx="8790305" cy="379095"/>
           </a:xfrm>
           <a:prstGeom prst="rect">
@@ -12875,13 +13382,37 @@
               </a:rPr>
               <a:t>limits.</a:t>
             </a:r>
-            <a:endParaRPr sz="2300">
+            <a:endParaRPr sz="2300" dirty="0">
               <a:latin typeface="Times New Roman"/>
               <a:cs typeface="Times New Roman"/>
             </a:endParaRPr>
           </a:p>
         </p:txBody>
       </p:sp>
+      <p:pic>
+        <p:nvPicPr>
+          <p:cNvPr id="7" name="Picture 6"/>
+          <p:cNvPicPr>
+            <a:picLocks noChangeAspect="1"/>
+          </p:cNvPicPr>
+          <p:nvPr/>
+        </p:nvPicPr>
+        <p:blipFill>
+          <a:blip r:embed="rId2"/>
+          <a:stretch>
+            <a:fillRect/>
+          </a:stretch>
+        </p:blipFill>
+        <p:spPr>
+          <a:xfrm>
+            <a:off x="1822450" y="3603718"/>
+            <a:ext cx="14871348" cy="5719173"/>
+          </a:xfrm>
+          <a:prstGeom prst="rect">
+            <a:avLst/>
+          </a:prstGeom>
+        </p:spPr>
+      </p:pic>
     </p:spTree>
   </p:cSld>
   <p:clrMapOvr>
@@ -14037,4 +14568,265 @@
   <a:objectDefaults/>
   <a:extraClrSchemeLst/>
 </a:theme>
+</file>
+
+<file path=ppt/theme/theme2.xml><?xml version="1.0" encoding="utf-8"?>
+<a:theme xmlns:a="http://schemas.openxmlformats.org/drawingml/2006/main" name="Office Theme">
+  <a:themeElements>
+    <a:clrScheme name="Office">
+      <a:dk1>
+        <a:sysClr val="windowText" lastClr="000000"/>
+      </a:dk1>
+      <a:lt1>
+        <a:sysClr val="window" lastClr="FFFFFF"/>
+      </a:lt1>
+      <a:dk2>
+        <a:srgbClr val="44546A"/>
+      </a:dk2>
+      <a:lt2>
+        <a:srgbClr val="E7E6E6"/>
+      </a:lt2>
+      <a:accent1>
+        <a:srgbClr val="5B9BD5"/>
+      </a:accent1>
+      <a:accent2>
+        <a:srgbClr val="ED7D31"/>
+      </a:accent2>
+      <a:accent3>
+        <a:srgbClr val="A5A5A5"/>
+      </a:accent3>
+      <a:accent4>
+        <a:srgbClr val="FFC000"/>
+      </a:accent4>
+      <a:accent5>
+        <a:srgbClr val="4472C4"/>
+      </a:accent5>
+      <a:accent6>
+        <a:srgbClr val="70AD47"/>
+      </a:accent6>
+      <a:hlink>
+        <a:srgbClr val="0563C1"/>
+      </a:hlink>
+      <a:folHlink>
+        <a:srgbClr val="954F72"/>
+      </a:folHlink>
+    </a:clrScheme>
+    <a:fontScheme name="Office">
+      <a:majorFont>
+        <a:latin typeface="Calibri Light" panose="020F0302020204030204"/>
+        <a:ea typeface=""/>
+        <a:cs typeface=""/>
+        <a:font script="Jpan" typeface="游ゴシック Light"/>
+        <a:font script="Hang" typeface="맑은 고딕"/>
+        <a:font script="Hans" typeface="等线 Light"/>
+        <a:font script="Hant" typeface="新細明體"/>
+        <a:font script="Arab" typeface="Times New Roman"/>
+        <a:font script="Hebr" typeface="Times New Roman"/>
+        <a:font script="Thai" typeface="Angsana New"/>
+        <a:font script="Ethi" typeface="Nyala"/>
+        <a:font script="Beng" typeface="Vrinda"/>
+        <a:font script="Gujr" typeface="Shruti"/>
+        <a:font script="Khmr" typeface="MoolBoran"/>
+        <a:font script="Knda" typeface="Tunga"/>
+        <a:font script="Guru" typeface="Raavi"/>
+        <a:font script="Cans" typeface="Euphemia"/>
+        <a:font script="Cher" typeface="Plantagenet Cherokee"/>
+        <a:font script="Yiii" typeface="Microsoft Yi Baiti"/>
+        <a:font script="Tibt" typeface="Microsoft Himalaya"/>
+        <a:font script="Thaa" typeface="MV Boli"/>
+        <a:font script="Deva" typeface="Mangal"/>
+        <a:font script="Telu" typeface="Gautami"/>
+        <a:font script="Taml" typeface="Latha"/>
+        <a:font script="Syrc" typeface="Estrangelo Edessa"/>
+        <a:font script="Orya" typeface="Kalinga"/>
+        <a:font script="Mlym" typeface="Kartika"/>
+        <a:font script="Laoo" typeface="DokChampa"/>
+        <a:font script="Sinh" typeface="Iskoola Pota"/>
+        <a:font script="Mong" typeface="Mongolian Baiti"/>
+        <a:font script="Viet" typeface="Times New Roman"/>
+        <a:font script="Uigh" typeface="Microsoft Uighur"/>
+        <a:font script="Geor" typeface="Sylfaen"/>
+      </a:majorFont>
+      <a:minorFont>
+        <a:latin typeface="Calibri" panose="020F0502020204030204"/>
+        <a:ea typeface=""/>
+        <a:cs typeface=""/>
+        <a:font script="Jpan" typeface="游ゴシック"/>
+        <a:font script="Hang" typeface="맑은 고딕"/>
+        <a:font script="Hans" typeface="等线"/>
+        <a:font script="Hant" typeface="新細明體"/>
+        <a:font script="Arab" typeface="Arial"/>
+        <a:font script="Hebr" typeface="Arial"/>
+        <a:font script="Thai" typeface="Cordia New"/>
+        <a:font script="Ethi" typeface="Nyala"/>
+        <a:font script="Beng" typeface="Vrinda"/>
+        <a:font script="Gujr" typeface="Shruti"/>
+        <a:font script="Khmr" typeface="DaunPenh"/>
+        <a:font script="Knda" typeface="Tunga"/>
+        <a:font script="Guru" typeface="Raavi"/>
+        <a:font script="Cans" typeface="Euphemia"/>
+        <a:font script="Cher" typeface="Plantagenet Cherokee"/>
+        <a:font script="Yiii" typeface="Microsoft Yi Baiti"/>
+        <a:font script="Tibt" typeface="Microsoft Himalaya"/>
+        <a:font script="Thaa" typeface="MV Boli"/>
+        <a:font script="Deva" typeface="Mangal"/>
+        <a:font script="Telu" typeface="Gautami"/>
+        <a:font script="Taml" typeface="Latha"/>
+        <a:font script="Syrc" typeface="Estrangelo Edessa"/>
+        <a:font script="Orya" typeface="Kalinga"/>
+        <a:font script="Mlym" typeface="Kartika"/>
+        <a:font script="Laoo" typeface="DokChampa"/>
+        <a:font script="Sinh" typeface="Iskoola Pota"/>
+        <a:font script="Mong" typeface="Mongolian Baiti"/>
+        <a:font script="Viet" typeface="Arial"/>
+        <a:font script="Uigh" typeface="Microsoft Uighur"/>
+        <a:font script="Geor" typeface="Sylfaen"/>
+      </a:minorFont>
+    </a:fontScheme>
+    <a:fmtScheme name="Office">
+      <a:fillStyleLst>
+        <a:solidFill>
+          <a:schemeClr val="phClr"/>
+        </a:solidFill>
+        <a:gradFill rotWithShape="1">
+          <a:gsLst>
+            <a:gs pos="0">
+              <a:schemeClr val="phClr">
+                <a:lumMod val="110000"/>
+                <a:satMod val="105000"/>
+                <a:tint val="67000"/>
+              </a:schemeClr>
+            </a:gs>
+            <a:gs pos="50000">
+              <a:schemeClr val="phClr">
+                <a:lumMod val="105000"/>
+                <a:satMod val="103000"/>
+                <a:tint val="73000"/>
+              </a:schemeClr>
+            </a:gs>
+            <a:gs pos="100000">
+              <a:schemeClr val="phClr">
+                <a:lumMod val="105000"/>
+                <a:satMod val="109000"/>
+                <a:tint val="81000"/>
+              </a:schemeClr>
+            </a:gs>
+          </a:gsLst>
+          <a:lin ang="5400000" scaled="0"/>
+        </a:gradFill>
+        <a:gradFill rotWithShape="1">
+          <a:gsLst>
+            <a:gs pos="0">
+              <a:schemeClr val="phClr">
+                <a:satMod val="103000"/>
+                <a:lumMod val="102000"/>
+                <a:tint val="94000"/>
+              </a:schemeClr>
+            </a:gs>
+            <a:gs pos="50000">
+              <a:schemeClr val="phClr">
+                <a:satMod val="110000"/>
+                <a:lumMod val="100000"/>
+                <a:shade val="100000"/>
+              </a:schemeClr>
+            </a:gs>
+            <a:gs pos="100000">
+              <a:schemeClr val="phClr">
+                <a:lumMod val="99000"/>
+                <a:satMod val="120000"/>
+                <a:shade val="78000"/>
+              </a:schemeClr>
+            </a:gs>
+          </a:gsLst>
+          <a:lin ang="5400000" scaled="0"/>
+        </a:gradFill>
+      </a:fillStyleLst>
+      <a:lnStyleLst>
+        <a:ln w="6350" cap="flat" cmpd="sng" algn="ctr">
+          <a:solidFill>
+            <a:schemeClr val="phClr"/>
+          </a:solidFill>
+          <a:prstDash val="solid"/>
+          <a:miter lim="800000"/>
+        </a:ln>
+        <a:ln w="12700" cap="flat" cmpd="sng" algn="ctr">
+          <a:solidFill>
+            <a:schemeClr val="phClr"/>
+          </a:solidFill>
+          <a:prstDash val="solid"/>
+          <a:miter lim="800000"/>
+        </a:ln>
+        <a:ln w="19050" cap="flat" cmpd="sng" algn="ctr">
+          <a:solidFill>
+            <a:schemeClr val="phClr"/>
+          </a:solidFill>
+          <a:prstDash val="solid"/>
+          <a:miter lim="800000"/>
+        </a:ln>
+      </a:lnStyleLst>
+      <a:effectStyleLst>
+        <a:effectStyle>
+          <a:effectLst/>
+        </a:effectStyle>
+        <a:effectStyle>
+          <a:effectLst/>
+        </a:effectStyle>
+        <a:effectStyle>
+          <a:effectLst>
+            <a:outerShdw blurRad="57150" dist="19050" dir="5400000" algn="ctr" rotWithShape="0">
+              <a:srgbClr val="000000">
+                <a:alpha val="63000"/>
+              </a:srgbClr>
+            </a:outerShdw>
+          </a:effectLst>
+        </a:effectStyle>
+      </a:effectStyleLst>
+      <a:bgFillStyleLst>
+        <a:solidFill>
+          <a:schemeClr val="phClr"/>
+        </a:solidFill>
+        <a:solidFill>
+          <a:schemeClr val="phClr">
+            <a:tint val="95000"/>
+            <a:satMod val="170000"/>
+          </a:schemeClr>
+        </a:solidFill>
+        <a:gradFill rotWithShape="1">
+          <a:gsLst>
+            <a:gs pos="0">
+              <a:schemeClr val="phClr">
+                <a:tint val="93000"/>
+                <a:satMod val="150000"/>
+                <a:shade val="98000"/>
+                <a:lumMod val="102000"/>
+              </a:schemeClr>
+            </a:gs>
+            <a:gs pos="50000">
+              <a:schemeClr val="phClr">
+                <a:tint val="98000"/>
+                <a:satMod val="130000"/>
+                <a:shade val="90000"/>
+                <a:lumMod val="103000"/>
+              </a:schemeClr>
+            </a:gs>
+            <a:gs pos="100000">
+              <a:schemeClr val="phClr">
+                <a:shade val="63000"/>
+                <a:satMod val="120000"/>
+              </a:schemeClr>
+            </a:gs>
+          </a:gsLst>
+          <a:lin ang="5400000" scaled="0"/>
+        </a:gradFill>
+      </a:bgFillStyleLst>
+    </a:fmtScheme>
+  </a:themeElements>
+  <a:objectDefaults/>
+  <a:extraClrSchemeLst/>
+  <a:extLst>
+    <a:ext uri="{05A4C25C-085E-4340-85A3-A5531E510DB2}">
+      <thm15:themeFamily xmlns:thm15="http://schemas.microsoft.com/office/thememl/2012/main" name="Office Theme" id="{62F939B6-93AF-4DB8-9C6B-D6C7DFDC589F}" vid="{4A3C46E8-61CC-4603-A589-7422A47A8E4A}"/>
+    </a:ext>
+  </a:extLst>
+</a:theme>
 </file>